--- a/1차 Project/3. 화면 설계서.pptx
+++ b/1차 Project/3. 화면 설계서.pptx
@@ -115,10 +115,9 @@
 <file path=ppt/revisionInfo.xml><?xml version="1.0" encoding="utf-8"?>
 <p1510:revInfo xmlns:a="http://schemas.openxmlformats.org/drawingml/2006/main" xmlns:r="http://schemas.openxmlformats.org/officeDocument/2006/relationships" xmlns:p1510="http://schemas.microsoft.com/office/powerpoint/2015/10/main">
   <p1510:revLst>
-    <p1510:client id="{1076A266-F073-4BEE-A498-70C49DF5B5BC}" v="238" dt="2026-03-13T04:49:59.069"/>
-    <p1510:client id="{463439AC-DE7E-4042-BD8E-4B3AD3CACCB5}" v="1983" dt="2026-03-13T08:11:26.845"/>
-    <p1510:client id="{9A88B9CC-74D1-4A19-AE98-368250AE8D85}" v="1" dt="2026-03-13T01:09:57.030"/>
-    <p1510:client id="{EF0DC70E-F6E4-47AD-AFC4-3FA60941A9A3}" v="9" dt="2026-03-13T01:09:32.152"/>
+    <p1510:client id="{303041DB-9893-4AE1-8EB4-2444F9B4D24C}" v="18" dt="2026-03-16T01:18:18.175"/>
+    <p1510:client id="{37F941D1-AC41-4734-BF11-9A17476CAE39}" v="7" dt="2026-03-16T01:16:40.319"/>
+    <p1510:client id="{AC17923A-732D-42BC-A218-5F63D3444C99}" v="35" dt="2026-03-16T01:14:37.574"/>
   </p1510:revLst>
 </p1510:revInfo>
 </file>
@@ -143,6 +142,7 @@
           <inkml:channelProperty channel="OE" name="resolution" value="1000" units="1/deg"/>
         </inkml:channelProperties>
       </inkml:inkSource>
+      <inkml:timestamp xml:id="ts0" timeString="2026-03-16T00:57:56.696"/>
     </inkml:context>
     <inkml:brush xml:id="br0">
       <inkml:brushProperty name="width" value="0.1" units="cm"/>
@@ -174,6 +174,7 @@
           <inkml:channelProperty channel="OE" name="resolution" value="1000" units="1/deg"/>
         </inkml:channelProperties>
       </inkml:inkSource>
+      <inkml:timestamp xml:id="ts0" timeString="2026-03-16T00:57:56.697"/>
     </inkml:context>
     <inkml:brush xml:id="br0">
       <inkml:brushProperty name="width" value="0.35" units="cm"/>
@@ -205,6 +206,7 @@
           <inkml:channelProperty channel="OE" name="resolution" value="1000" units="1/deg"/>
         </inkml:channelProperties>
       </inkml:inkSource>
+      <inkml:timestamp xml:id="ts0" timeString="2026-03-16T00:57:56.698"/>
     </inkml:context>
     <inkml:brush xml:id="br0">
       <inkml:brushProperty name="width" value="0.35" units="cm"/>
@@ -236,6 +238,7 @@
           <inkml:channelProperty channel="OE" name="resolution" value="1000" units="1/deg"/>
         </inkml:channelProperties>
       </inkml:inkSource>
+      <inkml:timestamp xml:id="ts0" timeString="2026-03-16T00:57:56.699"/>
     </inkml:context>
     <inkml:brush xml:id="br0">
       <inkml:brushProperty name="width" value="0.35" units="cm"/>
@@ -376,7 +379,7 @@
           <a:p>
             <a:fld id="{2566825D-2B69-4989-8861-A6901ABADB6C}" type="datetimeFigureOut">
               <a:rPr lang="ko-KR" altLang="en-US" smtClean="0"/>
-              <a:t>2026-03-12</a:t>
+              <a:t>2026-03-15</a:t>
             </a:fld>
             <a:endParaRPr lang="ko-KR" altLang="en-US"/>
           </a:p>
@@ -544,7 +547,7 @@
           <a:p>
             <a:fld id="{2566825D-2B69-4989-8861-A6901ABADB6C}" type="datetimeFigureOut">
               <a:rPr lang="ko-KR" altLang="en-US" smtClean="0"/>
-              <a:t>2026-03-12</a:t>
+              <a:t>2026-03-15</a:t>
             </a:fld>
             <a:endParaRPr lang="ko-KR" altLang="en-US"/>
           </a:p>
@@ -722,7 +725,7 @@
           <a:p>
             <a:fld id="{2566825D-2B69-4989-8861-A6901ABADB6C}" type="datetimeFigureOut">
               <a:rPr lang="ko-KR" altLang="en-US" smtClean="0"/>
-              <a:t>2026-03-12</a:t>
+              <a:t>2026-03-15</a:t>
             </a:fld>
             <a:endParaRPr lang="ko-KR" altLang="en-US"/>
           </a:p>
@@ -890,7 +893,7 @@
           <a:p>
             <a:fld id="{2566825D-2B69-4989-8861-A6901ABADB6C}" type="datetimeFigureOut">
               <a:rPr lang="ko-KR" altLang="en-US" smtClean="0"/>
-              <a:t>2026-03-12</a:t>
+              <a:t>2026-03-15</a:t>
             </a:fld>
             <a:endParaRPr lang="ko-KR" altLang="en-US"/>
           </a:p>
@@ -1135,7 +1138,7 @@
           <a:p>
             <a:fld id="{2566825D-2B69-4989-8861-A6901ABADB6C}" type="datetimeFigureOut">
               <a:rPr lang="ko-KR" altLang="en-US" smtClean="0"/>
-              <a:t>2026-03-12</a:t>
+              <a:t>2026-03-15</a:t>
             </a:fld>
             <a:endParaRPr lang="ko-KR" altLang="en-US"/>
           </a:p>
@@ -1364,7 +1367,7 @@
           <a:p>
             <a:fld id="{2566825D-2B69-4989-8861-A6901ABADB6C}" type="datetimeFigureOut">
               <a:rPr lang="ko-KR" altLang="en-US" smtClean="0"/>
-              <a:t>2026-03-12</a:t>
+              <a:t>2026-03-15</a:t>
             </a:fld>
             <a:endParaRPr lang="ko-KR" altLang="en-US"/>
           </a:p>
@@ -1728,7 +1731,7 @@
           <a:p>
             <a:fld id="{2566825D-2B69-4989-8861-A6901ABADB6C}" type="datetimeFigureOut">
               <a:rPr lang="ko-KR" altLang="en-US" smtClean="0"/>
-              <a:t>2026-03-12</a:t>
+              <a:t>2026-03-15</a:t>
             </a:fld>
             <a:endParaRPr lang="ko-KR" altLang="en-US"/>
           </a:p>
@@ -1845,7 +1848,7 @@
           <a:p>
             <a:fld id="{2566825D-2B69-4989-8861-A6901ABADB6C}" type="datetimeFigureOut">
               <a:rPr lang="ko-KR" altLang="en-US" smtClean="0"/>
-              <a:t>2026-03-12</a:t>
+              <a:t>2026-03-15</a:t>
             </a:fld>
             <a:endParaRPr lang="ko-KR" altLang="en-US"/>
           </a:p>
@@ -1940,7 +1943,7 @@
           <a:p>
             <a:fld id="{2566825D-2B69-4989-8861-A6901ABADB6C}" type="datetimeFigureOut">
               <a:rPr lang="ko-KR" altLang="en-US" smtClean="0"/>
-              <a:t>2026-03-12</a:t>
+              <a:t>2026-03-15</a:t>
             </a:fld>
             <a:endParaRPr lang="ko-KR" altLang="en-US"/>
           </a:p>
@@ -2215,7 +2218,7 @@
           <a:p>
             <a:fld id="{2566825D-2B69-4989-8861-A6901ABADB6C}" type="datetimeFigureOut">
               <a:rPr lang="ko-KR" altLang="en-US" smtClean="0"/>
-              <a:t>2026-03-12</a:t>
+              <a:t>2026-03-15</a:t>
             </a:fld>
             <a:endParaRPr lang="ko-KR" altLang="en-US"/>
           </a:p>
@@ -2467,7 +2470,7 @@
           <a:p>
             <a:fld id="{2566825D-2B69-4989-8861-A6901ABADB6C}" type="datetimeFigureOut">
               <a:rPr lang="ko-KR" altLang="en-US" smtClean="0"/>
-              <a:t>2026-03-12</a:t>
+              <a:t>2026-03-15</a:t>
             </a:fld>
             <a:endParaRPr lang="ko-KR" altLang="en-US"/>
           </a:p>
@@ -2678,7 +2681,7 @@
           <a:p>
             <a:fld id="{2566825D-2B69-4989-8861-A6901ABADB6C}" type="datetimeFigureOut">
               <a:rPr lang="ko-KR" altLang="en-US" smtClean="0"/>
-              <a:t>2026-03-12</a:t>
+              <a:t>2026-03-15</a:t>
             </a:fld>
             <a:endParaRPr lang="ko-KR" altLang="en-US"/>
           </a:p>
@@ -4226,69 +4229,6 @@
       </p:sp>
       <p:sp>
         <p:nvSpPr>
-          <p:cNvPr id="14" name="TextBox 13">
-            <a:extLst>
-              <a:ext uri="{FF2B5EF4-FFF2-40B4-BE49-F238E27FC236}">
-                <a16:creationId xmlns:a16="http://schemas.microsoft.com/office/drawing/2014/main" id="{3964AE57-FC40-15E1-ABDE-C4458D765DBE}"/>
-              </a:ext>
-            </a:extLst>
-          </p:cNvPr>
-          <p:cNvSpPr txBox="1">
-            <a:spLocks/>
-          </p:cNvSpPr>
-          <p:nvPr/>
-        </p:nvSpPr>
-        <p:spPr>
-          <a:xfrm>
-            <a:off x="1882477" y="1360551"/>
-            <a:ext cx="255012" cy="254925"/>
-          </a:xfrm>
-          <a:prstGeom prst="ellipse">
-            <a:avLst/>
-          </a:prstGeom>
-          <a:solidFill>
-            <a:srgbClr val="FF0000">
-              <a:alpha val="60000"/>
-            </a:srgbClr>
-          </a:solidFill>
-          <a:ln>
-            <a:solidFill>
-              <a:srgbClr val="FF0000">
-                <a:alpha val="60000"/>
-              </a:srgbClr>
-            </a:solidFill>
-          </a:ln>
-        </p:spPr>
-        <p:txBody>
-          <a:bodyPr rot="0" spcFirstLastPara="0" vertOverflow="overflow" horzOverflow="overflow" vert="horz" wrap="square" lIns="91440" tIns="45720" rIns="91440" bIns="45720" numCol="1" spcCol="0" rtlCol="0" fromWordArt="0" anchor="ctr" anchorCtr="0" forceAA="0" compatLnSpc="1">
-            <a:prstTxWarp prst="textNoShape">
-              <a:avLst/>
-            </a:prstTxWarp>
-            <a:noAutofit/>
-          </a:bodyPr>
-          <a:lstStyle/>
-          <a:p>
-            <a:pPr algn="ctr"/>
-            <a:r>
-              <a:rPr lang="ko-KR" altLang="en-US" sz="800" b="1">
-                <a:solidFill>
-                  <a:schemeClr val="bg1"/>
-                </a:solidFill>
-                <a:ea typeface="맑은 고딕"/>
-              </a:rPr>
-              <a:t>5</a:t>
-            </a:r>
-            <a:endParaRPr lang="ko-KR" altLang="en-US" sz="800" b="1" dirty="0">
-              <a:solidFill>
-                <a:schemeClr val="bg1"/>
-              </a:solidFill>
-              <a:ea typeface="맑은 고딕"/>
-            </a:endParaRPr>
-          </a:p>
-        </p:txBody>
-      </p:sp>
-      <p:sp>
-        <p:nvSpPr>
           <p:cNvPr id="15" name="TextBox 14">
             <a:extLst>
               <a:ext uri="{FF2B5EF4-FFF2-40B4-BE49-F238E27FC236}">
@@ -4413,8 +4353,8 @@
           </a:p>
         </p:txBody>
       </p:sp>
-      <mc:AlternateContent xmlns:mc="http://schemas.openxmlformats.org/markup-compatibility/2006">
-        <mc:Choice xmlns:p14="http://schemas.microsoft.com/office/powerpoint/2010/main" Requires="p14">
+      <mc:AlternateContent xmlns:mc="http://schemas.openxmlformats.org/markup-compatibility/2006" xmlns:p14="http://schemas.microsoft.com/office/powerpoint/2010/main">
+        <mc:Choice Requires="p14">
           <p:contentPart p14:bwMode="auto" r:id="rId3">
             <p14:nvContentPartPr>
               <p14:cNvPr id="18" name="잉크 17">
@@ -4433,7 +4373,7 @@
             </p14:xfrm>
           </p:contentPart>
         </mc:Choice>
-        <mc:Fallback>
+        <mc:Fallback xmlns="">
           <p:pic>
             <p:nvPicPr>
               <p:cNvPr id="18" name="잉크 17">
@@ -4464,8 +4404,8 @@
           </p:pic>
         </mc:Fallback>
       </mc:AlternateContent>
-      <mc:AlternateContent xmlns:mc="http://schemas.openxmlformats.org/markup-compatibility/2006">
-        <mc:Choice xmlns:p14="http://schemas.microsoft.com/office/powerpoint/2010/main" Requires="p14">
+      <mc:AlternateContent xmlns:mc="http://schemas.openxmlformats.org/markup-compatibility/2006" xmlns:p14="http://schemas.microsoft.com/office/powerpoint/2010/main">
+        <mc:Choice Requires="p14">
           <p:contentPart p14:bwMode="auto" r:id="rId5">
             <p14:nvContentPartPr>
               <p14:cNvPr id="23" name="잉크 22">
@@ -4484,7 +4424,7 @@
             </p14:xfrm>
           </p:contentPart>
         </mc:Choice>
-        <mc:Fallback>
+        <mc:Fallback xmlns="">
           <p:pic>
             <p:nvPicPr>
               <p:cNvPr id="23" name="잉크 22">
@@ -4515,8 +4455,8 @@
           </p:pic>
         </mc:Fallback>
       </mc:AlternateContent>
-      <mc:AlternateContent xmlns:mc="http://schemas.openxmlformats.org/markup-compatibility/2006">
-        <mc:Choice xmlns:p14="http://schemas.microsoft.com/office/powerpoint/2010/main" Requires="p14">
+      <mc:AlternateContent xmlns:mc="http://schemas.openxmlformats.org/markup-compatibility/2006" xmlns:p14="http://schemas.microsoft.com/office/powerpoint/2010/main">
+        <mc:Choice Requires="p14">
           <p:contentPart p14:bwMode="auto" r:id="rId7">
             <p14:nvContentPartPr>
               <p14:cNvPr id="24" name="잉크 23">
@@ -4535,7 +4475,7 @@
             </p14:xfrm>
           </p:contentPart>
         </mc:Choice>
-        <mc:Fallback>
+        <mc:Fallback xmlns="">
           <p:pic>
             <p:nvPicPr>
               <p:cNvPr id="24" name="잉크 23">
@@ -4566,8 +4506,8 @@
           </p:pic>
         </mc:Fallback>
       </mc:AlternateContent>
-      <mc:AlternateContent xmlns:mc="http://schemas.openxmlformats.org/markup-compatibility/2006">
-        <mc:Choice xmlns:p14="http://schemas.microsoft.com/office/powerpoint/2010/main" Requires="p14">
+      <mc:AlternateContent xmlns:mc="http://schemas.openxmlformats.org/markup-compatibility/2006" xmlns:p14="http://schemas.microsoft.com/office/powerpoint/2010/main">
+        <mc:Choice Requires="p14">
           <p:contentPart p14:bwMode="auto" r:id="rId9">
             <p14:nvContentPartPr>
               <p14:cNvPr id="26" name="잉크 25">
@@ -4586,7 +4526,7 @@
             </p14:xfrm>
           </p:contentPart>
         </mc:Choice>
-        <mc:Fallback>
+        <mc:Fallback xmlns="">
           <p:pic>
             <p:nvPicPr>
               <p:cNvPr id="26" name="잉크 25">
@@ -4800,6 +4740,84 @@
       </p:sp>
       <p:sp>
         <p:nvSpPr>
+          <p:cNvPr id="32" name="TextBox 31">
+            <a:extLst>
+              <a:ext uri="{FF2B5EF4-FFF2-40B4-BE49-F238E27FC236}">
+                <a16:creationId xmlns:a16="http://schemas.microsoft.com/office/drawing/2014/main" id="{2ABC3B95-4A73-ABB0-8B6B-14215950F9CB}"/>
+              </a:ext>
+            </a:extLst>
+          </p:cNvPr>
+          <p:cNvSpPr txBox="1"/>
+          <p:nvPr/>
+        </p:nvSpPr>
+        <p:spPr>
+          <a:xfrm>
+            <a:off x="1834661" y="3798275"/>
+            <a:ext cx="339968" cy="215444"/>
+          </a:xfrm>
+          <a:prstGeom prst="rect">
+            <a:avLst/>
+          </a:prstGeom>
+          <a:noFill/>
+        </p:spPr>
+        <p:txBody>
+          <a:bodyPr rot="0" spcFirstLastPara="0" vertOverflow="overflow" horzOverflow="overflow" vert="horz" wrap="square" lIns="91440" tIns="45720" rIns="91440" bIns="45720" numCol="1" spcCol="0" rtlCol="0" fromWordArt="0" anchor="t" anchorCtr="0" forceAA="0" compatLnSpc="1">
+            <a:prstTxWarp prst="textNoShape">
+              <a:avLst/>
+            </a:prstTxWarp>
+            <a:spAutoFit/>
+          </a:bodyPr>
+          <a:lstStyle/>
+          <a:p>
+            <a:pPr algn="l"/>
+            <a:r>
+              <a:rPr lang="ko-KR" altLang="en-US" sz="800" b="1">
+                <a:solidFill>
+                  <a:schemeClr val="bg1"/>
+                </a:solidFill>
+                <a:latin typeface="Malgun Gothic"/>
+                <a:ea typeface="Malgun Gothic"/>
+              </a:rPr>
+              <a:t>10</a:t>
+            </a:r>
+          </a:p>
+        </p:txBody>
+      </p:sp>
+      <p:pic>
+        <p:nvPicPr>
+          <p:cNvPr id="4" name="그림 3" descr="텍스트, 로고, 폰트, 그래픽이(가) 표시된 사진&#10;&#10;AI 생성 콘텐츠는 정확하지 않을 수 있습니다.">
+            <a:extLst>
+              <a:ext uri="{FF2B5EF4-FFF2-40B4-BE49-F238E27FC236}">
+                <a16:creationId xmlns:a16="http://schemas.microsoft.com/office/drawing/2014/main" id="{3F8496A6-2FF5-ADCE-D223-467CFBF75E5F}"/>
+              </a:ext>
+            </a:extLst>
+          </p:cNvPr>
+          <p:cNvPicPr>
+            <a:picLocks noChangeAspect="1"/>
+          </p:cNvPicPr>
+          <p:nvPr/>
+        </p:nvPicPr>
+        <p:blipFill>
+          <a:blip r:embed="rId11"/>
+          <a:stretch>
+            <a:fillRect/>
+          </a:stretch>
+        </p:blipFill>
+        <p:spPr>
+          <a:xfrm>
+            <a:off x="2574975" y="15225"/>
+            <a:ext cx="4786050" cy="503550"/>
+          </a:xfrm>
+          <a:prstGeom prst="rect">
+            <a:avLst/>
+          </a:prstGeom>
+          <a:ln>
+            <a:noFill/>
+          </a:ln>
+        </p:spPr>
+      </p:pic>
+      <p:sp>
+        <p:nvSpPr>
           <p:cNvPr id="31" name="TextBox 30">
             <a:extLst>
               <a:ext uri="{FF2B5EF4-FFF2-40B4-BE49-F238E27FC236}">
@@ -4814,7 +4832,7 @@
         </p:nvSpPr>
         <p:spPr>
           <a:xfrm>
-            <a:off x="4837635" y="407198"/>
+            <a:off x="5761635" y="407198"/>
             <a:ext cx="255012" cy="254925"/>
           </a:xfrm>
           <a:prstGeom prst="ellipse">
@@ -4855,48 +4873,132 @@
           </a:p>
         </p:txBody>
       </p:sp>
-      <p:sp>
-        <p:nvSpPr>
-          <p:cNvPr id="32" name="TextBox 31">
+      <p:pic>
+        <p:nvPicPr>
+          <p:cNvPr id="21" name="그림 20" descr="폰트, 텍스트, 그래픽, 화이트이(가) 표시된 사진&#10;&#10;AI 생성 콘텐츠는 정확하지 않을 수 있습니다.">
             <a:extLst>
               <a:ext uri="{FF2B5EF4-FFF2-40B4-BE49-F238E27FC236}">
-                <a16:creationId xmlns:a16="http://schemas.microsoft.com/office/drawing/2014/main" id="{2ABC3B95-4A73-ABB0-8B6B-14215950F9CB}"/>
+                <a16:creationId xmlns:a16="http://schemas.microsoft.com/office/drawing/2014/main" id="{295E08B5-B3A0-E47D-95FA-D97204734641}"/>
               </a:ext>
             </a:extLst>
           </p:cNvPr>
-          <p:cNvSpPr txBox="1"/>
+          <p:cNvPicPr>
+            <a:picLocks noChangeAspect="1"/>
+          </p:cNvPicPr>
           <p:nvPr/>
-        </p:nvSpPr>
+        </p:nvPicPr>
+        <p:blipFill>
+          <a:blip r:embed="rId12"/>
+          <a:stretch>
+            <a:fillRect/>
+          </a:stretch>
+        </p:blipFill>
         <p:spPr>
           <a:xfrm>
-            <a:off x="1834661" y="3798275"/>
-            <a:ext cx="339968" cy="215444"/>
+            <a:off x="2524433" y="2236839"/>
+            <a:ext cx="3124200" cy="405581"/>
           </a:xfrm>
           <a:prstGeom prst="rect">
             <a:avLst/>
           </a:prstGeom>
-          <a:noFill/>
+          <a:ln>
+            <a:noFill/>
+          </a:ln>
         </p:spPr>
-        <p:txBody>
-          <a:bodyPr rot="0" spcFirstLastPara="0" vertOverflow="overflow" horzOverflow="overflow" vert="horz" wrap="square" lIns="91440" tIns="45720" rIns="91440" bIns="45720" numCol="1" spcCol="0" rtlCol="0" fromWordArt="0" anchor="t" anchorCtr="0" forceAA="0" compatLnSpc="1">
+      </p:pic>
+      <p:pic>
+        <p:nvPicPr>
+          <p:cNvPr id="3" name="그림 2" descr="텍스트, 라인, 그래프, 스크린샷이(가) 표시된 사진&#10;&#10;AI 생성 콘텐츠는 정확하지 않을 수 있습니다.">
+            <a:extLst>
+              <a:ext uri="{FF2B5EF4-FFF2-40B4-BE49-F238E27FC236}">
+                <a16:creationId xmlns:a16="http://schemas.microsoft.com/office/drawing/2014/main" id="{07359A41-1768-DC96-7AB4-7B4AA0F9BE06}"/>
+              </a:ext>
+            </a:extLst>
+          </p:cNvPr>
+          <p:cNvPicPr>
+            <a:picLocks noChangeAspect="1"/>
+          </p:cNvPicPr>
+          <p:nvPr/>
+        </p:nvPicPr>
+        <p:blipFill>
+          <a:blip r:embed="rId13"/>
+          <a:stretch>
+            <a:fillRect/>
+          </a:stretch>
+        </p:blipFill>
+        <p:spPr>
+          <a:xfrm>
+            <a:off x="342900" y="1527283"/>
+            <a:ext cx="1698736" cy="1629107"/>
+          </a:xfrm>
+          <a:prstGeom prst="rect">
+            <a:avLst/>
+          </a:prstGeom>
+          <a:ln>
+            <a:noFill/>
+          </a:ln>
+        </p:spPr>
+      </p:pic>
+      <p:sp>
+        <p:nvSpPr>
+          <p:cNvPr id="14" name="TextBox 13">
+            <a:extLst>
+              <a:ext uri="{FF2B5EF4-FFF2-40B4-BE49-F238E27FC236}">
+                <a16:creationId xmlns:a16="http://schemas.microsoft.com/office/drawing/2014/main" id="{3964AE57-FC40-15E1-ABDE-C4458D765DBE}"/>
+              </a:ext>
+            </a:extLst>
+          </p:cNvPr>
+          <p:cNvSpPr txBox="1">
+            <a:spLocks/>
+          </p:cNvSpPr>
+          <p:nvPr/>
+        </p:nvSpPr>
+        <p:spPr>
+          <a:xfrm>
+            <a:off x="1882477" y="1360551"/>
+            <a:ext cx="255012" cy="254925"/>
+          </a:xfrm>
+          <a:prstGeom prst="ellipse">
+            <a:avLst/>
+          </a:prstGeom>
+          <a:solidFill>
+            <a:srgbClr val="FF0000">
+              <a:alpha val="60000"/>
+            </a:srgbClr>
+          </a:solidFill>
+          <a:ln>
+            <a:solidFill>
+              <a:srgbClr val="FF0000">
+                <a:alpha val="60000"/>
+              </a:srgbClr>
+            </a:solidFill>
+          </a:ln>
+        </p:spPr>
+        <p:txBody>
+          <a:bodyPr rot="0" spcFirstLastPara="0" vertOverflow="overflow" horzOverflow="overflow" vert="horz" wrap="square" lIns="91440" tIns="45720" rIns="91440" bIns="45720" numCol="1" spcCol="0" rtlCol="0" fromWordArt="0" anchor="ctr" anchorCtr="0" forceAA="0" compatLnSpc="1">
             <a:prstTxWarp prst="textNoShape">
               <a:avLst/>
             </a:prstTxWarp>
-            <a:spAutoFit/>
+            <a:noAutofit/>
           </a:bodyPr>
           <a:lstStyle/>
           <a:p>
-            <a:pPr algn="l"/>
+            <a:pPr algn="ctr"/>
             <a:r>
               <a:rPr lang="ko-KR" altLang="en-US" sz="800" b="1">
                 <a:solidFill>
                   <a:schemeClr val="bg1"/>
                 </a:solidFill>
-                <a:latin typeface="Malgun Gothic"/>
-                <a:ea typeface="Malgun Gothic"/>
+                <a:ea typeface="맑은 고딕"/>
               </a:rPr>
-              <a:t>10</a:t>
-            </a:r>
+              <a:t>5</a:t>
+            </a:r>
+            <a:endParaRPr lang="ko-KR" altLang="en-US" sz="800" b="1" dirty="0">
+              <a:solidFill>
+                <a:schemeClr val="bg1"/>
+              </a:solidFill>
+              <a:ea typeface="맑은 고딕"/>
+            </a:endParaRPr>
           </a:p>
         </p:txBody>
       </p:sp>
